--- a/lectures/lecture1/lecture1.pptx
+++ b/lectures/lecture1/lecture1.pptx
@@ -112,6 +112,43 @@
     </a:lvl9pPr>
   </p:defaultTextStyle>
 </p:presentation>
+</file>
+
+<file path=ppt/revisionInfo.xml><?xml version="1.0" encoding="utf-8"?>
+<p1510:revInfo xmlns:a="http://schemas.openxmlformats.org/drawingml/2006/main" xmlns:r="http://schemas.openxmlformats.org/officeDocument/2006/relationships" xmlns:p1510="http://schemas.microsoft.com/office/powerpoint/2015/10/main">
+  <p1510:revLst>
+    <p1510:client id="{69538508-CD5C-3F4E-B1D0-8B6D6669B284}" v="1" dt="2026-05-12T21:11:46.384"/>
+  </p1510:revLst>
+</p1510:revInfo>
+</file>
+
+<file path=ppt/ink/ink1.xml><?xml version="1.0" encoding="utf-8"?>
+<inkml:ink xmlns:inkml="http://www.w3.org/2003/InkML">
+  <inkml:definitions>
+    <inkml:context xml:id="ctx0">
+      <inkml:inkSource xml:id="inkSrc0">
+        <inkml:traceFormat>
+          <inkml:channel name="X" type="integer" min="-2.14748E9" max="2.14748E9" units="cm"/>
+          <inkml:channel name="Y" type="integer" min="-2.14748E9" max="2.14748E9" units="cm"/>
+          <inkml:channel name="F" type="integer" max="32767" units="dev"/>
+        </inkml:traceFormat>
+        <inkml:channelProperties>
+          <inkml:channelProperty channel="X" name="resolution" value="1000" units="1/cm"/>
+          <inkml:channelProperty channel="Y" name="resolution" value="1000" units="1/cm"/>
+          <inkml:channelProperty channel="F" name="resolution" value="0" units="1/dev"/>
+        </inkml:channelProperties>
+      </inkml:inkSource>
+      <inkml:timestamp xml:id="ts0" timeString="2026-05-12T21:09:23.271"/>
+    </inkml:context>
+    <inkml:brush xml:id="br0">
+      <inkml:brushProperty name="width" value="0.05292" units="cm"/>
+      <inkml:brushProperty name="height" value="0.05292" units="cm"/>
+      <inkml:brushProperty name="color" value="#FF0000"/>
+    </inkml:brush>
+  </inkml:definitions>
+  <inkml:trace contextRef="#ctx0" brushRef="#br0">20655 10918 24575,'0'48'0,"0"0"0,0 0 0,0 0 0,0 0 0,0 0 0,0-1 0,0 1 0,0 0 0,0 0 0,0 0 0,0 0 0,0 4 0,0-4 0,0-2 0,0-1 0,0 2 0,0 2 0,0 5-235,0-13 1,0 4 0,0 3 0,0 1 0,0 2 0,0 1 0,0 1 0,0-1 0,0 0 0,0-2 0,0-1 0,0-3 0,0-2 0,0-4-313,0 16 1,0-4 0,0-4 0,0-2 0,0 0 0,0 2-1,0 0 1,0 0 0,0 0 0,0 0 0,0-1 0,0 0 544,0-3 0,0-1 0,0 0 0,0-1 0,0 0 0,0-1 2,0 2 0,0 0 0,0-2 0,0 1 0,0-1 247,0 7 1,-1 1 0,1-2 0,1-1-248,4 5 0,1-3 0,-1 0-113,-4-5 1,-1-2 0,3 0 112,6-4 0,4-2 0,-4 1 0,-6-2 0,-3 1 0,1-2 1638,7 8 0,0-2-934,-7-7 0,-2 1 536,1 10 0,0-4-1240,0-13 716,0 0 0,0 2-716,0 16 0,0-7 0,0 6 0,-1-2 0,0 4 0,3 0-352,4 3 0,4 0 0,-3 1 352,-5-6 0,-2 2 0,0-1 0,4-1 0,4-6 0,4 0 0,-1-2 0,-3 1-221,-5 8 1,-4 0 0,3-1 220,8-2 0,2-2 0,-2 1 0,-9-4 0,-2 1 0,4-3 0,17 9 0,0-1 0,-19 10 0,4-6 0,34-21 0,-38 8 0,2-3 1591,36-24-1591,-18 33 359,11-36 1,3-2-360,-7 13 0,1 3 0,13-3 0,2 0 0,-12-3 0,-1 2 0,2 0-327,4 2 0,2 0 0,1-2 327,5-4 0,2-3 0,2-1-522,-7-1 1,2 1 0,0-1 0,0-2 521,2-1 0,1-1 0,0 0 0,2-1-473,-5 1 0,1 0 1,1 0-1,0 0 0,0 0 473,-3 0 0,0 0 0,0 0 0,0 0 0,0 0 0,3 0 0,0 0 0,0 0 0,0 0 0,-2 0-360,4 0 1,-1 0 0,-1 0 0,1 0 359,1 1 0,0-1 0,0 1 0,-2-3 0,-4-1 0,-2-1 0,0-1 0,-1 2 83,7 1 0,-1 2 0,-1-2-83,-3-3 0,-1-2 0,-1 3 0,5 3 0,0 2 0,-10-1 0,1 0 0,0 0 0,0 0 0,0 1 0,2-2 0,11-3 0,2-3 0,-1 2 137,-1 4 0,0 0 0,1-1-137,-6-1 0,1-2 0,0 1 0,0 1 0,-3 2 0,-1 2 0,0 0 0,0-2 0,-2-4 0,0-2 0,-1 0 0,0 2 410,10 3 0,-1 1 0,1-2-410,2-3 0,0-3 0,0 1 0,-6 2 0,-1 0 0,2 2 0,-3 3 0,3 1 0,0 0 0,-3-3 0,4-6 0,-3-4 0,1 4 0,6 7 0,1 3 0,-2-4 506,-10-8 1,-2-4 0,-2 2-507,9 4 0,-6-4 267,-12-11 1,-7-3-268,-2-10 1535,-16 10-1535,15 11 1247,-11 0-1247,20 14 0,7 0 0,-7-16 0,1-3 0,6 8 0,5 2 0,1-2-409,4-9 0,0-3 1,1 1 408,3 3 0,1 0 0,-2-1 0,-8-3 0,-3-2 0,0 2 0,12-1 0,-8-3 0,-24-4 0,-6-2 0,2 1 0,-3-3 0,-4 2 0,-2-4 0,-1-3 0,0-1-588,1-3 1,0-2-1,0-1 1,0-2 587,0 10 0,0-2 0,0-1 0,0 0 0,0 0 0,0 2 0,0-6 0,0 1 0,0 0 0,0 2 0,0 0 0,1-2 0,-1 1 0,0 0 0,-1 1-337,-1 2 0,-2 0 0,-1 0 0,1 2 337,-2-9 0,0 3 0,-2-1 0,-1 10 0,-3 1 0,1-1 0,0 0 0,2-2 0,0-1 0,1 0 0,-3 0 0,-5 0 0,-2 0 0,0-1 0,3-2-316,5 1 0,3-2 1,0-2-1,0 0 1,-3 1 315,-2 6 0,-2 0 0,-1 0 0,-1-1 0,2 1 0,3-2 0,2-1 0,2-1 0,2-1 0,0 1 0,-2-1 0,-2 2 0,-3-1 0,-2 2 0,-2-1 0,1 1 0,1 0 0,3 0 0,3-5 0,4 0 0,1 1 0,-1 0 0,-2 1-292,-5 1 0,-3 1 0,0 1 0,0 0 1,4 1 291,2-6 0,3 1 0,1 0 0,-1 1 0,-1 1 0,-1 0 0,0 1 0,0-1 0,-1 0 0,-1 1 0,1-1 0,2-1 0,3-3 0,2 0 0,2-1 0,-2 0 0,-2 8 0,-1 1 0,1-1 0,-1 0 0,2 0 0,1-1 0,1 0 0,0-1 0,1 1 0,-1-1 0,0 1 0,1 0 0,0 0 0,-2-1 0,0 1-32,-3-3 1,-1-1-1,0 0 1,-1 1 0,2-1 31,2 3 0,2 0 0,-1 0 0,1 0 0,-2 0 0,-2-3 0,-2 0 0,1 0 0,-1 1 0,3 0 34,2-5 1,1 0-1,1 1 1,-1 2-35,0-3 0,0 2 0,0 1 778,0 3 0,0 1 1,0 5-779,1 3 0,-2 5 1732,-15-15-1732,12 22 2543,-11 23-2543,-1 0 1428,12 0-1428,-35 0 82,17 0-82,-5 23 0,-1-13 0,1 2 0,14 12 0,1 3 0,-19-8 0,-5-1 0,11 3 0,0 2 0,-1 0-568,-8-1 0,-1-1 0,-4 0 568,0-1 0,-2 0 0,-3 0 0,1 1-459,6-4 0,0 0 0,-1 1 0,0-1 0,0 0 459,-1-1 0,0 0 0,-1 0 0,1 0 0,0 0 0,2 1 0,0 1 0,0 0 0,0 0 0,1-1 0,-8 4 0,0-2 0,0 1 0,1 1-398,3 0 1,0 2 0,1-1-1,-2-2 398,-2-4 0,-2-3 0,1 0 0,1 2 0,6 1 0,0 2 0,2-1 0,-1-2-131,-9-1 1,1-3 0,2 2 130,8 3 0,3 2 0,0-1 0,-12 2 0,0-1 0,-5-4 0,0-1 0,2 3 0,-1 0 0,9-7 0,-3-1 0,1 2 0,4 2 0,0 1 0,0-1 0,-4-2 0,-1-1 0,-1 0 21,6-1 1,-1 0 0,0 0 0,0-1-22,-1 0 0,0 0 0,0-1 0,-1 2 0,-3 0 0,-1 1 0,1 0 0,0 2 0,4 1 0,1 2 0,-1 0 0,0-3 0,-2-4 0,-2-3 0,1 0 0,2 2 0,-6 7 0,3 2 0,-1-4 474,0-7 0,-2-5 0,2 2-474,1 4 0,2 0 0,2 1 854,3 2 1,2 0-855,-6-7 0,3 2 478,-7 12-478,6-15 1534,10 0-1534,-13 0 750,19 24-750,-10-20 0,-5-2 0,4 10 0,0-1 0,-8-9 0,-1-4 0,6 2 0,0 0 0,-1 0 0,3 0 0,2 0 0,1 0 0,5 0 0,19 0 0,-33 0 0,-4 0 0,1 16 0,1-14 0,0 0 0,0 14 0,7-17 0,1 2 0,-4 22 0,11-20 0,1 0 0,4 20 0,-3-46 0,24 17 0,0-17 0,0 23 0</inkml:trace>
+  <inkml:trace contextRef="#ctx0" brushRef="#br0" timeOffset="45817">27111 9772 24575,'0'46'0,"0"1"0,0 0 0,0-1 0,0 1 0,0 0 0,0 3 0,0 1 0,0 3 0,0-10 0,0 2 0,0 2 0,0 0 0,0 2 0,0 0 0,0 0 0,0 0-365,0-2 1,0 0 0,0 0 0,0 0 0,0 1 0,0 1 0,0-1 0,0 2 0,0-1 66,0-5 0,0 1 0,0 0 0,0 1 0,0 0 0,0 0 0,0 1 0,0-2 1,0 1-1,0-1 0,0-1-67,0 5 1,0 0 0,0 0 0,0-1 0,0 0 0,0-1 0,0 1 0,0-1 0,0 0 116,0-3 1,0 1 0,0 0 0,0-1 0,0 0 0,0-1 0,0 0 0,0 0 0,0-2 247,0 7 0,0-2 0,0 0 0,0-1 0,0-1 0,0 0 0,0 0 30,0 3 1,0-1 0,0 0 0,0 0-1,0-1 1,0 1-31,0 0 0,0 0 0,0 0 0,0-1 0,0 1 0,0-1 0,0-1 0,0 0 0,0 0 0,0 0 0,0-1 0,0-1-235,0 3 0,0-1 0,0-1 0,0 1 0,0 0 235,0 4 0,0 0 0,0 1 0,0-1 0,0-1 0,0-4 0,0-1 0,0-1 0,0 1 0,0 1 0,0 4 0,0 1 0,0 1 0,0 1 0,0 0 290,0-6 1,0 2 0,0 0 0,0 0 0,0-1 0,0 0-291,0-3 0,0 0 0,0-1 0,0 0 0,0-1 0,0 1 0,0 5 0,0 1 0,0-1 0,0-2 0,0-1 569,0 0 0,0-1 0,0-2 0,0-2-569,0 3 0,0-1 0,0-5 1271,0-1 0,0-5-1271,0 13 2212,0-27-2212,0 7 3276,0-17-3204,0 18 1,0 7 777,0 16-850,7-15 0,2 1 0,-8-2 0,2-2 0,12 15 0,-15-25 0,24-3 0,-18-16 0,17 0 0,-23 0 0,16 0 0,-12-16 0,27 12 0,-27-27 0,35 27 0,6-12 0,-14 15 0,3 2 0,1-1 0,2 0 0,1 0-312,-5 1 0,1 0 0,1-3 312,12-4 0,2-4 0,2 3-385,-14 4 1,1 3 0,-1-1 0,2-1 384,0-3 0,1-2 0,0 0 0,1 2 0,6 4 0,0 2 0,2 0 0,-2-2-578,0-2 1,-1-1 0,1-1 0,2 2 577,-5 1 0,1 2 0,1 0 0,0-1 0,0 0 0,-3-2 0,0 1 0,0-2 0,0 1 0,0-1 0,6 0 0,0-2 0,0 1 0,0 0 0,-2 2 0,5 0 0,-2 3 0,-1-1 0,0-1 0,-8-2 0,-1-2 0,0 1 0,0 0 0,-1 1-319,6 3 1,-1 1 0,-1 1 0,0-1 318,-3 0 0,1 0 0,-2 0 0,1 0 0,1 0 0,-1 0 0,0 0 0,-2 0 49,2 0 0,-1 0 0,0 0-49,6 0 0,1 0 0,-4 0 0,-3 0 0,0 0 0,1 0 0,3 0 0,0 0 0,-2 0 0,0 0 0,0 0 0,2 0 0,0 0 0,1 0 0,4 0 0,1 0 0,1 0 99,-1 0 0,0 0 1,0 0-100,-6 0 0,0 0 0,0 0 0,6 0 0,1 0 0,-2 0 0,-6 0 0,-1 0 0,0 0 571,-5 0 1,-1 0 0,1 0-572,4 0 0,1 0 0,-2 0 0,7 0 0,0 0 0,-7 0 0,1 0 0,1 0 0,-1 0 0,1 0 0,1 0 112,2 0 1,1 0 0,1 0-113,-7 0 0,0 0 0,0 0 0,1 0 0,0 0 0,0 0 0,0 0 0,-1 0 0,10 0 0,-1 0 0,0 0 0,-3 0 0,-1 0 0,-2 0 283,7 0 0,-2 0-283,-3 0 0,-2 0 0,-2 0 0,1 0 0,2 0 0,2 0 0,-11 0 0,2 0 0,-2 0 0,8 0 0,0 0 0,-8 1 0,1 0 0,-2-3 0,8-5 0,-2-2 556,-6 8 0,-1-1-556,2-7 0,-1 2 529,4 7-529,-10-16 1273,-11 12-1273,-14-21 0,-4-5 77,2 5-77,1-14 0,-2-4 0,-5 10 0,-4 1 0,-3 0 0,-1-1 0,2 3 0,-1-3 0,1-2-780,1 2 0,0-3 1,0-1-1,1-4 780,0 4 0,0-3 0,-1-1 0,1-2 0,1-1 0,0 0-469,1 2 1,0-1 0,1 0 0,0-2 0,1 1 0,-1-1 0,1 0 397,-1-3 1,0 0 0,1-1 0,0 1 0,-1-1 0,1 2 0,0 1 70,-1-2 0,0 0 0,0 1 0,0 2 0,1 0 0,0 1-194,2-1 0,0 2 0,0 0 0,1 2 0,-1 2 194,-1-14 0,-1 4 0,-3 4-36,-4 11 1,-2 2 0,4 2 35,8-14 0,0 1 0,-8 13 0,-4-1 0,2-4-10,6-3 0,3-4 0,0-2 0,-1-2 10,-1 7 0,-1 0 0,-1-2 0,1-1 0,-1-1 0,1-2-143,2 3 1,0-1 0,0-2 0,0 0 0,0-2 0,1 0 0,0 0 0,0 0 142,0 2 0,1-1 0,-1 0 0,1-1 0,0 0 0,0 0 0,1 0 0,-1 0 0,1 0 0,-1-1 0,2 0 0,-1 0 0,0 0 0,1 0 0,-1 0 0,1 1 0,-1 0 0,0 2 0,-1-2 0,0 1 0,0 0 0,0 0 0,-1 2 0,1 0 0,1 1 0,-1 2-1,2-5 0,1 1 0,0 1 0,-1 2 0,0 2 0,-1 2 1,-6-13 0,-2 5 0,4 4 48,5-4 0,2 10-48,-1 14 2097,0-1-2097,0 7 3276,0 12-1070,0-35-735,0 2-1471,0-8 0,0-5 0,0 17 0,0 0 0,0-2-275,0-8 0,0-2 0,0 1 275,0 2 0,0 1 0,0 1 0,0 3 0,0 1 0,0 1 0,0-14 0,0 2 0,0 10 0,0 3 0,0 7 0,0 1 0,0 0 0,0 1 0,0 4 0,-16-3 825,12 24-825,-27 0 0,27 0 0,-35 0 0,17 24 0,-21-18 0,15 12 0,-3 3 0,-6-6 0,-6-3-507,2 0 1,-4-1 0,0 4 506,9 0 0,1 3 0,-2 0 0,0-3 0,-6-3 0,-1-2 0,0-1 0,0 1 0,4 5 0,0 1 0,0 0 0,0-4 0,-3-4 0,-1-5 0,0 1 0,0 1-537,-1 4 1,-1 1 0,0 1-1,-1-2 537,-2-2 0,0-2 0,0-1 0,0 2 0,2 0 0,0 0 0,0 1 0,0 1 0,6 0 0,-1 1 0,1 0 0,-1-2 0,2-1 0,-4-3 0,2-2 0,-1-1 0,0 2 0,2 2 0,0 1 0,-1 1 0,0-1 0,0-1 0,0-3 0,0-1 0,0 0 0,-1-1 0,0 1-507,-2 0 0,-1 0 0,-1 0 0,1 0 0,-1 0 507,-2-1 0,-1 1 0,1-1 0,-1 2 0,1 0 0,2 1 0,1 1 0,0 1 0,0 0 0,0-2 0,0 0 0,-1-2 0,1 0 0,1 1 0,1 0-245,-1 3 0,2 0 0,1 1 0,0-2 245,0-2 0,-1-1 0,3-1 0,2 1 506,-9 0 1,2 0-507,-7 0 0,4 0 1826,-1 0-1826,6 0 2865,12 0-2865,-12 0 0,5 1 0,-5-2 0,2-3 0,-3-1 0,-2-2-129,5 1 1,-1 0-1,-1-1 1,0-1 128,0-1 0,1 0 0,-1 0 0,-1-1 0,-4-3 0,-1-1 0,1 1 0,3 2 0,3 2 0,3 3 0,-2-1-110,4 1 1,-2 0 0,1 0 0,3 1 109,-5-4 0,2 2 0,-10 5 0,2 0 0,18-6 0,3 0 0,-18 8 0,23 0 1871,-19 0-1871,33 0 556,-17 0-556,7 0 0,12 0 0,-35 0 0,33 0 0,-18-15 0,24 11 0,0-12 0,0 16 0,0 0 0,-15 0 0,11 0 0,-28 0 0,5 0 0,-2 0 0,-3 0 0,-17 0 0,6 0 0,4 0 0,13 0 0,-13-24 0,24 19 0,26-19 0,-22 8 0,26 12 0,-15-11 0</inkml:trace>
+</inkml:ink>
 </file>
 
 <file path=ppt/slideLayouts/slideLayout1.xml><?xml version="1.0" encoding="utf-8"?>
@@ -3476,8 +3513,12 @@
           </a:p>
           <a:p>
             <a:r>
+              <a:rPr lang="en-US"/>
+              <a:t>Includes </a:t>
+            </a:r>
+            <a:r>
               <a:rPr lang="en-US" dirty="0"/>
-              <a:t>It includes programming, and some math, e.g. O-notation</a:t>
+              <a:t>programming, and some math, e.g. O-notation</a:t>
             </a:r>
           </a:p>
           <a:p>
@@ -5947,6 +5988,57 @@
           </a:fontRef>
         </p:style>
       </p:cxnSp>
+      <mc:AlternateContent xmlns:mc="http://schemas.openxmlformats.org/markup-compatibility/2006">
+        <mc:Choice xmlns:p14="http://schemas.microsoft.com/office/powerpoint/2010/main" Requires="p14">
+          <p:contentPart p14:bwMode="auto" r:id="rId2">
+            <p14:nvContentPartPr>
+              <p14:cNvPr id="42" name="Ink 41">
+                <a:extLst>
+                  <a:ext uri="{FF2B5EF4-FFF2-40B4-BE49-F238E27FC236}">
+                    <a16:creationId xmlns:a16="http://schemas.microsoft.com/office/drawing/2014/main" id="{B5A2E8CA-94F5-AF8F-35B1-089D407F4C03}"/>
+                  </a:ext>
+                </a:extLst>
+              </p14:cNvPr>
+              <p14:cNvContentPartPr/>
+              <p14:nvPr/>
+            </p14:nvContentPartPr>
+            <p14:xfrm>
+              <a:off x="7385040" y="3365640"/>
+              <a:ext cx="4731840" cy="2432880"/>
+            </p14:xfrm>
+          </p:contentPart>
+        </mc:Choice>
+        <mc:Fallback>
+          <p:pic>
+            <p:nvPicPr>
+              <p:cNvPr id="42" name="Ink 41">
+                <a:extLst>
+                  <a:ext uri="{FF2B5EF4-FFF2-40B4-BE49-F238E27FC236}">
+                    <a16:creationId xmlns:a16="http://schemas.microsoft.com/office/drawing/2014/main" id="{B5A2E8CA-94F5-AF8F-35B1-089D407F4C03}"/>
+                  </a:ext>
+                </a:extLst>
+              </p:cNvPr>
+              <p:cNvPicPr/>
+              <p:nvPr/>
+            </p:nvPicPr>
+            <p:blipFill>
+              <a:blip r:embed="rId3"/>
+              <a:stretch>
+                <a:fillRect/>
+              </a:stretch>
+            </p:blipFill>
+            <p:spPr>
+              <a:xfrm>
+                <a:off x="7375680" y="3356280"/>
+                <a:ext cx="4750560" cy="2451600"/>
+              </a:xfrm>
+              <a:prstGeom prst="rect">
+                <a:avLst/>
+              </a:prstGeom>
+            </p:spPr>
+          </p:pic>
+        </mc:Fallback>
+      </mc:AlternateContent>
     </p:spTree>
     <p:extLst>
       <p:ext uri="{BB962C8B-B14F-4D97-AF65-F5344CB8AC3E}">
@@ -5999,10 +6091,9 @@
           <a:lstStyle/>
           <a:p>
             <a:r>
-              <a:rPr lang="en-US"/>
+              <a:rPr lang="en-US" dirty="0"/>
               <a:t>Practice Problem</a:t>
             </a:r>
-            <a:endParaRPr lang="en-US" dirty="0"/>
           </a:p>
         </p:txBody>
       </p:sp>
